--- a/00 Admin/11 Final Outputs/site/downloads/TapThat_Plan-on-a-Page_A3.pptx
+++ b/00 Admin/11 Final Outputs/site/downloads/TapThat_Plan-on-a-Page_A3.pptx
@@ -1326,8 +1326,8 @@
         </p:nvSpPr>
         <p:spPr>
           <a:xfrm>
-            <a:off x="12656964" y="365760"/>
-            <a:ext cx="1186641" cy="251460"/>
+            <a:off x="12673633" y="365760"/>
+            <a:ext cx="1169972" cy="251460"/>
           </a:xfrm>
           <a:prstGeom prst="roundRect">
             <a:avLst>
@@ -1353,8 +1353,8 @@
         </p:nvSpPr>
         <p:spPr>
           <a:xfrm>
-            <a:off x="12656964" y="365760"/>
-            <a:ext cx="1186641" cy="251460"/>
+            <a:off x="12673633" y="365760"/>
+            <a:ext cx="1169972" cy="251460"/>
           </a:xfrm>
           <a:prstGeom prst="rect">
             <a:avLst/>
@@ -1392,8 +1392,8 @@
         </p:nvSpPr>
         <p:spPr>
           <a:xfrm>
-            <a:off x="11321238" y="365760"/>
-            <a:ext cx="1245725" cy="251460"/>
+            <a:off x="11415298" y="365760"/>
+            <a:ext cx="1168335" cy="251460"/>
           </a:xfrm>
           <a:prstGeom prst="roundRect">
             <a:avLst>
@@ -1419,8 +1419,8 @@
         </p:nvSpPr>
         <p:spPr>
           <a:xfrm>
-            <a:off x="11321238" y="365760"/>
-            <a:ext cx="1245725" cy="251460"/>
+            <a:off x="11415298" y="365760"/>
+            <a:ext cx="1168335" cy="251460"/>
           </a:xfrm>
           <a:prstGeom prst="rect">
             <a:avLst/>
@@ -1458,8 +1458,8 @@
         </p:nvSpPr>
         <p:spPr>
           <a:xfrm>
-            <a:off x="10486915" y="365760"/>
-            <a:ext cx="744323" cy="251460"/>
+            <a:off x="10604043" y="365760"/>
+            <a:ext cx="721255" cy="251460"/>
           </a:xfrm>
           <a:prstGeom prst="roundRect">
             <a:avLst>
@@ -1485,8 +1485,8 @@
         </p:nvSpPr>
         <p:spPr>
           <a:xfrm>
-            <a:off x="10486915" y="365760"/>
-            <a:ext cx="744323" cy="251460"/>
+            <a:off x="10604043" y="365760"/>
+            <a:ext cx="721255" cy="251460"/>
           </a:xfrm>
           <a:prstGeom prst="rect">
             <a:avLst/>
@@ -3083,7 +3083,7 @@
                 <a:ea typeface="Poppins" pitchFamily="34" charset="-122"/>
                 <a:cs typeface="Poppins" pitchFamily="34" charset="-120"/>
               </a:rPr>
-              <a:t>Home entertainment, not beer.</a:t>
+              <a:t>The best night in, on tap.</a:t>
             </a:r>
             <a:endParaRPr lang="en-US" sz="960" dirty="0"/>
           </a:p>
@@ -3098,7 +3098,7 @@
         <p:spPr>
           <a:xfrm>
             <a:off x="4119925" y="4679120"/>
-            <a:ext cx="3292328" cy="593954"/>
+            <a:ext cx="3292328" cy="742442"/>
           </a:xfrm>
           <a:prstGeom prst="rect">
             <a:avLst/>
@@ -3139,7 +3139,7 @@
         </p:nvSpPr>
         <p:spPr>
           <a:xfrm>
-            <a:off x="4119925" y="5337874"/>
+            <a:off x="4119925" y="5486362"/>
             <a:ext cx="3292328" cy="296977"/>
           </a:xfrm>
           <a:prstGeom prst="rect">
@@ -3184,7 +3184,7 @@
                 <a:ea typeface="Poppins" pitchFamily="34" charset="-122"/>
                 <a:cs typeface="Poppins" pitchFamily="34" charset="-120"/>
               </a:rPr>
-              <a:t>rewrite key messaging for each target market on that basis, inside 30 days, Christy to lead.</a:t>
+              <a:t>Christy works the line into key messaging for each target market, inside 30 days.</a:t>
             </a:r>
             <a:endParaRPr lang="en-US" sz="790" dirty="0"/>
           </a:p>
@@ -3736,7 +3736,7 @@
         <p:spPr>
           <a:xfrm>
             <a:off x="438898" y="7617652"/>
-            <a:ext cx="671338" cy="205740"/>
+            <a:ext cx="663748" cy="205740"/>
           </a:xfrm>
           <a:prstGeom prst="roundRect">
             <a:avLst>
@@ -3763,7 +3763,7 @@
         <p:spPr>
           <a:xfrm>
             <a:off x="438898" y="7617652"/>
-            <a:ext cx="671338" cy="205740"/>
+            <a:ext cx="663748" cy="205740"/>
           </a:xfrm>
           <a:prstGeom prst="rect">
             <a:avLst/>
@@ -3801,8 +3801,8 @@
         </p:nvSpPr>
         <p:spPr>
           <a:xfrm>
-            <a:off x="1274827" y="7604851"/>
-            <a:ext cx="3685807" cy="237744"/>
+            <a:off x="1267237" y="7604851"/>
+            <a:ext cx="3693397" cy="237744"/>
           </a:xfrm>
           <a:prstGeom prst="rect">
             <a:avLst/>
@@ -3843,8 +3843,8 @@
         </p:nvSpPr>
         <p:spPr>
           <a:xfrm>
-            <a:off x="438898" y="7983019"/>
-            <a:ext cx="671338" cy="205740"/>
+            <a:off x="438898" y="7927584"/>
+            <a:ext cx="663748" cy="205740"/>
           </a:xfrm>
           <a:prstGeom prst="roundRect">
             <a:avLst>
@@ -3870,8 +3870,8 @@
         </p:nvSpPr>
         <p:spPr>
           <a:xfrm>
-            <a:off x="438898" y="7983019"/>
-            <a:ext cx="671338" cy="205740"/>
+            <a:off x="438898" y="7927584"/>
+            <a:ext cx="663748" cy="205740"/>
           </a:xfrm>
           <a:prstGeom prst="rect">
             <a:avLst/>
@@ -3909,8 +3909,8 @@
         </p:nvSpPr>
         <p:spPr>
           <a:xfrm>
-            <a:off x="1274827" y="7970218"/>
-            <a:ext cx="3685807" cy="237744"/>
+            <a:off x="1267237" y="7914782"/>
+            <a:ext cx="3693397" cy="308610"/>
           </a:xfrm>
           <a:prstGeom prst="rect">
             <a:avLst/>
@@ -3951,8 +3951,8 @@
         </p:nvSpPr>
         <p:spPr>
           <a:xfrm>
-            <a:off x="438898" y="8348386"/>
-            <a:ext cx="671338" cy="205740"/>
+            <a:off x="438898" y="8308381"/>
+            <a:ext cx="663748" cy="205740"/>
           </a:xfrm>
           <a:prstGeom prst="roundRect">
             <a:avLst>
@@ -3978,8 +3978,8 @@
         </p:nvSpPr>
         <p:spPr>
           <a:xfrm>
-            <a:off x="438898" y="8348386"/>
-            <a:ext cx="671338" cy="205740"/>
+            <a:off x="438898" y="8308381"/>
+            <a:ext cx="663748" cy="205740"/>
           </a:xfrm>
           <a:prstGeom prst="rect">
             <a:avLst/>
@@ -4017,8 +4017,8 @@
         </p:nvSpPr>
         <p:spPr>
           <a:xfrm>
-            <a:off x="1274827" y="8335585"/>
-            <a:ext cx="3685807" cy="237744"/>
+            <a:off x="1267237" y="8295580"/>
+            <a:ext cx="3693397" cy="237744"/>
           </a:xfrm>
           <a:prstGeom prst="rect">
             <a:avLst/>
@@ -4059,8 +4059,8 @@
         </p:nvSpPr>
         <p:spPr>
           <a:xfrm>
-            <a:off x="438898" y="8713753"/>
-            <a:ext cx="671338" cy="205740"/>
+            <a:off x="438898" y="8618313"/>
+            <a:ext cx="663748" cy="205740"/>
           </a:xfrm>
           <a:prstGeom prst="roundRect">
             <a:avLst>
@@ -4086,8 +4086,8 @@
         </p:nvSpPr>
         <p:spPr>
           <a:xfrm>
-            <a:off x="438898" y="8713753"/>
-            <a:ext cx="671338" cy="205740"/>
+            <a:off x="438898" y="8618313"/>
+            <a:ext cx="663748" cy="205740"/>
           </a:xfrm>
           <a:prstGeom prst="rect">
             <a:avLst/>
@@ -4125,8 +4125,8 @@
         </p:nvSpPr>
         <p:spPr>
           <a:xfrm>
-            <a:off x="1274827" y="8700952"/>
-            <a:ext cx="3685807" cy="237744"/>
+            <a:off x="1267237" y="8605511"/>
+            <a:ext cx="3693397" cy="308610"/>
           </a:xfrm>
           <a:prstGeom prst="rect">
             <a:avLst/>
@@ -4167,8 +4167,8 @@
         </p:nvSpPr>
         <p:spPr>
           <a:xfrm>
-            <a:off x="438898" y="9079120"/>
-            <a:ext cx="671338" cy="205740"/>
+            <a:off x="438898" y="8999110"/>
+            <a:ext cx="663748" cy="205740"/>
           </a:xfrm>
           <a:prstGeom prst="roundRect">
             <a:avLst>
@@ -4194,8 +4194,8 @@
         </p:nvSpPr>
         <p:spPr>
           <a:xfrm>
-            <a:off x="438898" y="9079120"/>
-            <a:ext cx="671338" cy="205740"/>
+            <a:off x="438898" y="8999110"/>
+            <a:ext cx="663748" cy="205740"/>
           </a:xfrm>
           <a:prstGeom prst="rect">
             <a:avLst/>
@@ -4233,8 +4233,8 @@
         </p:nvSpPr>
         <p:spPr>
           <a:xfrm>
-            <a:off x="1274827" y="9066319"/>
-            <a:ext cx="3685807" cy="308610"/>
+            <a:off x="1267237" y="8986309"/>
+            <a:ext cx="3693397" cy="308610"/>
           </a:xfrm>
           <a:prstGeom prst="rect">
             <a:avLst/>
@@ -4275,8 +4275,8 @@
         </p:nvSpPr>
         <p:spPr>
           <a:xfrm>
-            <a:off x="438898" y="9515353"/>
-            <a:ext cx="671338" cy="205740"/>
+            <a:off x="438898" y="9379908"/>
+            <a:ext cx="663748" cy="205740"/>
           </a:xfrm>
           <a:prstGeom prst="roundRect">
             <a:avLst>
@@ -4302,8 +4302,8 @@
         </p:nvSpPr>
         <p:spPr>
           <a:xfrm>
-            <a:off x="438898" y="9515353"/>
-            <a:ext cx="671338" cy="205740"/>
+            <a:off x="438898" y="9379908"/>
+            <a:ext cx="663748" cy="205740"/>
           </a:xfrm>
           <a:prstGeom prst="rect">
             <a:avLst/>
@@ -4341,8 +4341,8 @@
         </p:nvSpPr>
         <p:spPr>
           <a:xfrm>
-            <a:off x="1274827" y="9502552"/>
-            <a:ext cx="3685807" cy="237744"/>
+            <a:off x="1267237" y="9367106"/>
+            <a:ext cx="3693397" cy="308610"/>
           </a:xfrm>
           <a:prstGeom prst="rect">
             <a:avLst/>
@@ -4383,8 +4383,8 @@
         </p:nvSpPr>
         <p:spPr>
           <a:xfrm>
-            <a:off x="438898" y="9880720"/>
-            <a:ext cx="671338" cy="205740"/>
+            <a:off x="438898" y="9760705"/>
+            <a:ext cx="663748" cy="205740"/>
           </a:xfrm>
           <a:prstGeom prst="roundRect">
             <a:avLst>
@@ -4410,8 +4410,8 @@
         </p:nvSpPr>
         <p:spPr>
           <a:xfrm>
-            <a:off x="438898" y="9880720"/>
-            <a:ext cx="671338" cy="205740"/>
+            <a:off x="438898" y="9760705"/>
+            <a:ext cx="663748" cy="205740"/>
           </a:xfrm>
           <a:prstGeom prst="rect">
             <a:avLst/>
@@ -4449,8 +4449,8 @@
         </p:nvSpPr>
         <p:spPr>
           <a:xfrm>
-            <a:off x="1274827" y="9867919"/>
-            <a:ext cx="3685807" cy="237744"/>
+            <a:off x="1267237" y="9747904"/>
+            <a:ext cx="3693397" cy="237744"/>
           </a:xfrm>
           <a:prstGeom prst="rect">
             <a:avLst/>
@@ -4491,7 +4491,7 @@
         </p:nvSpPr>
         <p:spPr>
           <a:xfrm>
-            <a:off x="438898" y="10183264"/>
+            <a:off x="438898" y="10063249"/>
             <a:ext cx="4521737" cy="0"/>
           </a:xfrm>
           <a:prstGeom prst="line">
@@ -4514,8 +4514,8 @@
         </p:nvSpPr>
         <p:spPr>
           <a:xfrm>
-            <a:off x="438898" y="10240864"/>
-            <a:ext cx="4521737" cy="120015"/>
+            <a:off x="438898" y="10120849"/>
+            <a:ext cx="4521737" cy="240030"/>
           </a:xfrm>
           <a:prstGeom prst="rect">
             <a:avLst/>
@@ -4638,9 +4638,9 @@
             <a:tbl>
               <a:tblPr/>
               <a:tblGrid>
-                <a:gridCol w="2271871"/>
-                <a:gridCol w="695445"/>
-                <a:gridCol w="1554421"/>
+                <a:gridCol w="2354867"/>
+                <a:gridCol w="625530"/>
+                <a:gridCol w="1541340"/>
               </a:tblGrid>
               <a:tr h="283976">
                 <a:tc>
@@ -6753,8 +6753,8 @@
         </p:nvSpPr>
         <p:spPr>
           <a:xfrm>
-            <a:off x="12656964" y="365760"/>
-            <a:ext cx="1186641" cy="251460"/>
+            <a:off x="12673633" y="365760"/>
+            <a:ext cx="1169972" cy="251460"/>
           </a:xfrm>
           <a:prstGeom prst="roundRect">
             <a:avLst>
@@ -6780,8 +6780,8 @@
         </p:nvSpPr>
         <p:spPr>
           <a:xfrm>
-            <a:off x="12656964" y="365760"/>
-            <a:ext cx="1186641" cy="251460"/>
+            <a:off x="12673633" y="365760"/>
+            <a:ext cx="1169972" cy="251460"/>
           </a:xfrm>
           <a:prstGeom prst="rect">
             <a:avLst/>
@@ -6819,8 +6819,8 @@
         </p:nvSpPr>
         <p:spPr>
           <a:xfrm>
-            <a:off x="11321238" y="365760"/>
-            <a:ext cx="1245725" cy="251460"/>
+            <a:off x="11415298" y="365760"/>
+            <a:ext cx="1168335" cy="251460"/>
           </a:xfrm>
           <a:prstGeom prst="roundRect">
             <a:avLst>
@@ -6846,8 +6846,8 @@
         </p:nvSpPr>
         <p:spPr>
           <a:xfrm>
-            <a:off x="11321238" y="365760"/>
-            <a:ext cx="1245725" cy="251460"/>
+            <a:off x="11415298" y="365760"/>
+            <a:ext cx="1168335" cy="251460"/>
           </a:xfrm>
           <a:prstGeom prst="rect">
             <a:avLst/>
@@ -6885,8 +6885,8 @@
         </p:nvSpPr>
         <p:spPr>
           <a:xfrm>
-            <a:off x="10259357" y="365760"/>
-            <a:ext cx="971882" cy="251460"/>
+            <a:off x="10393302" y="365760"/>
+            <a:ext cx="931996" cy="251460"/>
           </a:xfrm>
           <a:prstGeom prst="roundRect">
             <a:avLst>
@@ -6912,8 +6912,8 @@
         </p:nvSpPr>
         <p:spPr>
           <a:xfrm>
-            <a:off x="10259357" y="365760"/>
-            <a:ext cx="971882" cy="251460"/>
+            <a:off x="10393302" y="365760"/>
+            <a:ext cx="931996" cy="251460"/>
           </a:xfrm>
           <a:prstGeom prst="rect">
             <a:avLst/>
@@ -7067,7 +7067,7 @@
         <p:spPr>
           <a:xfrm>
             <a:off x="438898" y="1400636"/>
-            <a:ext cx="6951755" cy="204724"/>
+            <a:ext cx="6951755" cy="409448"/>
           </a:xfrm>
           <a:prstGeom prst="rect">
             <a:avLst/>
@@ -7108,7 +7108,7 @@
         </p:nvSpPr>
         <p:spPr>
           <a:xfrm>
-            <a:off x="438898" y="1745994"/>
+            <a:off x="438898" y="1920009"/>
             <a:ext cx="6951755" cy="462915"/>
           </a:xfrm>
           <a:prstGeom prst="rect">
@@ -7184,7 +7184,7 @@
         </p:nvSpPr>
         <p:spPr>
           <a:xfrm>
-            <a:off x="438898" y="2349543"/>
+            <a:off x="438898" y="2492850"/>
             <a:ext cx="6951755" cy="308610"/>
           </a:xfrm>
           <a:prstGeom prst="rect">
@@ -7243,7 +7243,7 @@
         </p:nvSpPr>
         <p:spPr>
           <a:xfrm>
-            <a:off x="438898" y="2798787"/>
+            <a:off x="438898" y="2911385"/>
             <a:ext cx="6951755" cy="462915"/>
           </a:xfrm>
           <a:prstGeom prst="rect">
@@ -7449,11 +7449,11 @@
             <a:tbl>
               <a:tblPr/>
               <a:tblGrid>
-                <a:gridCol w="926127"/>
-                <a:gridCol w="2995924"/>
-                <a:gridCol w="3029704"/>
+                <a:gridCol w="955066"/>
+                <a:gridCol w="2998344"/>
+                <a:gridCol w="2998344"/>
               </a:tblGrid>
-              <a:tr h="363770">
+              <a:tr h="324044">
                 <a:tc>
                   <a:txBody>
                     <a:bodyPr/>
@@ -7614,7 +7614,7 @@
                   </a:tcPr>
                 </a:tc>
               </a:tr>
-              <a:tr h="384522">
+              <a:tr h="344796">
                 <a:tc>
                   <a:txBody>
                     <a:bodyPr/>
@@ -7792,7 +7792,7 @@
                   </a:tcPr>
                 </a:tc>
               </a:tr>
-              <a:tr h="384522">
+              <a:tr h="463973">
                 <a:tc>
                   <a:txBody>
                     <a:bodyPr/>
@@ -7970,7 +7970,7 @@
                   </a:tcPr>
                 </a:tc>
               </a:tr>
-              <a:tr h="503698">
+              <a:tr h="583150">
                 <a:tc>
                   <a:txBody>
                     <a:bodyPr/>
@@ -8148,7 +8148,7 @@
                   </a:tcPr>
                 </a:tc>
               </a:tr>
-              <a:tr h="384522">
+              <a:tr h="344796">
                 <a:tc>
                   <a:txBody>
                     <a:bodyPr/>
@@ -8326,7 +8326,7 @@
                   </a:tcPr>
                 </a:tc>
               </a:tr>
-              <a:tr h="384522">
+              <a:tr h="344796">
                 <a:tc>
                   <a:txBody>
                     <a:bodyPr/>
@@ -8958,8 +8958,8 @@
         </p:nvSpPr>
         <p:spPr>
           <a:xfrm>
-            <a:off x="438898" y="5356662"/>
-            <a:ext cx="4521737" cy="308610"/>
+            <a:off x="438898" y="5333516"/>
+            <a:ext cx="4521737" cy="462915"/>
           </a:xfrm>
           <a:prstGeom prst="rect">
             <a:avLst/>
@@ -9000,7 +9000,7 @@
         </p:nvSpPr>
         <p:spPr>
           <a:xfrm>
-            <a:off x="438898" y="5805628"/>
+            <a:off x="438898" y="5913641"/>
             <a:ext cx="4521737" cy="462915"/>
           </a:xfrm>
           <a:prstGeom prst="rect">
@@ -9059,7 +9059,7 @@
         </p:nvSpPr>
         <p:spPr>
           <a:xfrm>
-            <a:off x="438898" y="6408899"/>
+            <a:off x="438898" y="6493766"/>
             <a:ext cx="4521737" cy="308610"/>
           </a:xfrm>
           <a:prstGeom prst="rect">
@@ -9292,7 +9292,7 @@
         </p:nvSpPr>
         <p:spPr>
           <a:xfrm>
-            <a:off x="5298934" y="4965971"/>
+            <a:off x="5298934" y="4952469"/>
             <a:ext cx="4521737" cy="308610"/>
           </a:xfrm>
           <a:prstGeom prst="rect">
@@ -9351,7 +9351,7 @@
         </p:nvSpPr>
         <p:spPr>
           <a:xfrm>
-            <a:off x="5298934" y="5375169"/>
+            <a:off x="5298934" y="5348165"/>
             <a:ext cx="4521737" cy="308610"/>
           </a:xfrm>
           <a:prstGeom prst="rect">
@@ -9410,7 +9410,7 @@
         </p:nvSpPr>
         <p:spPr>
           <a:xfrm>
-            <a:off x="5298934" y="5784366"/>
+            <a:off x="5298934" y="5743861"/>
             <a:ext cx="4521737" cy="308610"/>
           </a:xfrm>
           <a:prstGeom prst="rect">
@@ -9469,7 +9469,7 @@
         </p:nvSpPr>
         <p:spPr>
           <a:xfrm>
-            <a:off x="5298934" y="6193564"/>
+            <a:off x="5298934" y="6139558"/>
             <a:ext cx="4521737" cy="617220"/>
           </a:xfrm>
           <a:prstGeom prst="rect">
@@ -9528,7 +9528,7 @@
         </p:nvSpPr>
         <p:spPr>
           <a:xfrm>
-            <a:off x="5298934" y="7085747"/>
+            <a:off x="5298934" y="6965732"/>
             <a:ext cx="4521737" cy="0"/>
           </a:xfrm>
           <a:prstGeom prst="line">
@@ -9551,8 +9551,8 @@
         </p:nvSpPr>
         <p:spPr>
           <a:xfrm>
-            <a:off x="5298934" y="7143347"/>
-            <a:ext cx="4521737" cy="120015"/>
+            <a:off x="5298934" y="7023332"/>
+            <a:ext cx="4521737" cy="240030"/>
           </a:xfrm>
           <a:prstGeom prst="rect">
             <a:avLst/>
@@ -10750,7 +10750,7 @@
         </p:nvSpPr>
         <p:spPr>
           <a:xfrm>
-            <a:off x="7728952" y="8509701"/>
+            <a:off x="7728952" y="8460256"/>
             <a:ext cx="50400" cy="50400"/>
           </a:xfrm>
           <a:prstGeom prst="rect">
@@ -10775,7 +10775,7 @@
         </p:nvSpPr>
         <p:spPr>
           <a:xfrm>
-            <a:off x="7836952" y="8464391"/>
+            <a:off x="7836952" y="8414945"/>
             <a:ext cx="6843755" cy="148336"/>
           </a:xfrm>
           <a:prstGeom prst="rect">
@@ -10834,7 +10834,7 @@
         </p:nvSpPr>
         <p:spPr>
           <a:xfrm>
-            <a:off x="7728952" y="9202562"/>
+            <a:off x="7728952" y="9103672"/>
             <a:ext cx="50400" cy="50400"/>
           </a:xfrm>
           <a:prstGeom prst="rect">
@@ -10859,8 +10859,8 @@
         </p:nvSpPr>
         <p:spPr>
           <a:xfrm>
-            <a:off x="7836952" y="9157252"/>
-            <a:ext cx="6843755" cy="148336"/>
+            <a:off x="7836952" y="9058361"/>
+            <a:ext cx="6843755" cy="296672"/>
           </a:xfrm>
           <a:prstGeom prst="rect">
             <a:avLst/>
@@ -11186,8 +11186,8 @@
         </p:nvSpPr>
         <p:spPr>
           <a:xfrm>
-            <a:off x="12656964" y="365760"/>
-            <a:ext cx="1186641" cy="251460"/>
+            <a:off x="12673633" y="365760"/>
+            <a:ext cx="1169972" cy="251460"/>
           </a:xfrm>
           <a:prstGeom prst="roundRect">
             <a:avLst>
@@ -11213,8 +11213,8 @@
         </p:nvSpPr>
         <p:spPr>
           <a:xfrm>
-            <a:off x="12656964" y="365760"/>
-            <a:ext cx="1186641" cy="251460"/>
+            <a:off x="12673633" y="365760"/>
+            <a:ext cx="1169972" cy="251460"/>
           </a:xfrm>
           <a:prstGeom prst="rect">
             <a:avLst/>
@@ -11252,8 +11252,8 @@
         </p:nvSpPr>
         <p:spPr>
           <a:xfrm>
-            <a:off x="11321238" y="365760"/>
-            <a:ext cx="1245725" cy="251460"/>
+            <a:off x="11415298" y="365760"/>
+            <a:ext cx="1168335" cy="251460"/>
           </a:xfrm>
           <a:prstGeom prst="roundRect">
             <a:avLst>
@@ -11279,8 +11279,8 @@
         </p:nvSpPr>
         <p:spPr>
           <a:xfrm>
-            <a:off x="11321238" y="365760"/>
-            <a:ext cx="1245725" cy="251460"/>
+            <a:off x="11415298" y="365760"/>
+            <a:ext cx="1168335" cy="251460"/>
           </a:xfrm>
           <a:prstGeom prst="rect">
             <a:avLst/>
@@ -11318,8 +11318,8 @@
         </p:nvSpPr>
         <p:spPr>
           <a:xfrm>
-            <a:off x="10259357" y="365760"/>
-            <a:ext cx="971882" cy="251460"/>
+            <a:off x="10372317" y="365760"/>
+            <a:ext cx="952980" cy="251460"/>
           </a:xfrm>
           <a:prstGeom prst="roundRect">
             <a:avLst>
@@ -11345,8 +11345,8 @@
         </p:nvSpPr>
         <p:spPr>
           <a:xfrm>
-            <a:off x="10259357" y="365760"/>
-            <a:ext cx="971882" cy="251460"/>
+            <a:off x="10372317" y="365760"/>
+            <a:ext cx="952980" cy="251460"/>
           </a:xfrm>
           <a:prstGeom prst="rect">
             <a:avLst/>
@@ -11527,7 +11527,7 @@
                 <a:ea typeface="Poppins" pitchFamily="34" charset="-122"/>
                 <a:cs typeface="Poppins" pitchFamily="34" charset="-120"/>
               </a:rPr>
-              <a:t>Your place, the best catch-up on the street. Home entertainment, not beer.</a:t>
+              <a:t>The best night in, on tap.</a:t>
             </a:r>
             <a:endParaRPr lang="en-US" sz="1340" dirty="0"/>
           </a:p>
@@ -11541,8 +11541,8 @@
         </p:nvSpPr>
         <p:spPr>
           <a:xfrm>
-            <a:off x="438898" y="1752181"/>
-            <a:ext cx="6951755" cy="617220"/>
+            <a:off x="438898" y="1729035"/>
+            <a:ext cx="6951755" cy="771525"/>
           </a:xfrm>
           <a:prstGeom prst="rect">
             <a:avLst/>
@@ -11569,7 +11569,7 @@
                 <a:ea typeface="Poppins" pitchFamily="34" charset="-122"/>
                 <a:cs typeface="Poppins" pitchFamily="34" charset="-120"/>
               </a:rPr>
-              <a:t>Every household deserves beer on tap is Justin's line </a:t>
+              <a:t>Chosen on 24 September, from three drafts. </a:t>
             </a:r>
             <a:pPr indent="0" marL="0">
               <a:lnSpc>
@@ -11586,7 +11586,7 @@
                 <a:ea typeface="Poppins" pitchFamily="34" charset="-122"/>
                 <a:cs typeface="Poppins" pitchFamily="34" charset="-120"/>
               </a:rPr>
-              <a:t>and it stays as the ambition. It is not the brand idea. The brand idea is what the product does to an ordinary Saturday: it turns a catch-up into the one people talk about. That puts Tap That in the home entertainment business, beside the outdoor kitchen, the high-end barbecue and the coffee machine, not beside the bar fridge. Same move BMW made from cars to mobility, and it opens the same doors: partners, product and price.</a:t>
+              <a:t>Every household deserves beer on tap is Justin's line and it stays as the ambition. It is not the brand idea. The brand idea is what the product does to an ordinary Saturday: it turns a catch-up into the one people talk about. That puts Tap That in the home entertainment business, beside the outdoor kitchen, the high-end barbecue and the coffee machine, not beside the bar fridge. Same move BMW made from cars to mobility, and it opens the same doors: partners, product and price.</a:t>
             </a:r>
             <a:endParaRPr lang="en-US" sz="810" dirty="0"/>
           </a:p>
@@ -11600,7 +11600,7 @@
         </p:nvSpPr>
         <p:spPr>
           <a:xfrm>
-            <a:off x="438898" y="2509923"/>
+            <a:off x="438898" y="2617936"/>
             <a:ext cx="6951755" cy="308610"/>
           </a:xfrm>
           <a:prstGeom prst="rect">
@@ -11642,7 +11642,7 @@
         </p:nvSpPr>
         <p:spPr>
           <a:xfrm>
-            <a:off x="438898" y="2959054"/>
+            <a:off x="438898" y="3043922"/>
             <a:ext cx="6951755" cy="308610"/>
           </a:xfrm>
           <a:prstGeom prst="rect">
@@ -11752,7 +11752,7 @@
                 <a:ea typeface="Poppins" pitchFamily="34" charset="-122"/>
                 <a:cs typeface="Poppins" pitchFamily="34" charset="-120"/>
               </a:rPr>
-              <a:t>Nobody on the Gold Coast owns this category, in market or in search. Christy owns the wording; this is her draft to sign off.</a:t>
+              <a:t>Nobody on the Gold Coast owns this category, in market or in search. Christy works the line into key messaging for each target market inside 30 days.</a:t>
             </a:r>
             <a:endParaRPr lang="en-US" sz="700" dirty="0"/>
           </a:p>
@@ -12236,7 +12236,7 @@
         <p:spPr>
           <a:xfrm>
             <a:off x="438898" y="4322293"/>
-            <a:ext cx="4521737" cy="308610"/>
+            <a:ext cx="4521737" cy="462915"/>
           </a:xfrm>
           <a:prstGeom prst="rect">
             <a:avLst/>
@@ -12294,7 +12294,7 @@
         </p:nvSpPr>
         <p:spPr>
           <a:xfrm>
-            <a:off x="438898" y="4796503"/>
+            <a:off x="438898" y="4950808"/>
             <a:ext cx="4521737" cy="308610"/>
           </a:xfrm>
           <a:prstGeom prst="rect">
@@ -12353,7 +12353,7 @@
         </p:nvSpPr>
         <p:spPr>
           <a:xfrm>
-            <a:off x="438898" y="5270713"/>
+            <a:off x="438898" y="5425018"/>
             <a:ext cx="4521737" cy="308610"/>
           </a:xfrm>
           <a:prstGeom prst="rect">
@@ -12412,7 +12412,7 @@
         </p:nvSpPr>
         <p:spPr>
           <a:xfrm>
-            <a:off x="438898" y="7115057"/>
+            <a:off x="438898" y="6995042"/>
             <a:ext cx="4521737" cy="0"/>
           </a:xfrm>
           <a:prstGeom prst="line">
@@ -12435,8 +12435,8 @@
         </p:nvSpPr>
         <p:spPr>
           <a:xfrm>
-            <a:off x="438898" y="7172657"/>
-            <a:ext cx="4521737" cy="120015"/>
+            <a:off x="438898" y="7052642"/>
+            <a:ext cx="4521737" cy="240030"/>
           </a:xfrm>
           <a:prstGeom prst="rect">
             <a:avLst/>
@@ -13652,7 +13652,7 @@
         <p:spPr>
           <a:xfrm>
             <a:off x="546898" y="7800840"/>
-            <a:ext cx="6843755" cy="131648"/>
+            <a:ext cx="6843755" cy="263296"/>
           </a:xfrm>
           <a:prstGeom prst="rect">
             <a:avLst/>
@@ -13710,7 +13710,7 @@
         </p:nvSpPr>
         <p:spPr>
           <a:xfrm>
-            <a:off x="438898" y="8647270"/>
+            <a:off x="438898" y="8691153"/>
             <a:ext cx="50400" cy="50400"/>
           </a:xfrm>
           <a:prstGeom prst="rect">
@@ -13735,7 +13735,7 @@
         </p:nvSpPr>
         <p:spPr>
           <a:xfrm>
-            <a:off x="546898" y="8610303"/>
+            <a:off x="546898" y="8654186"/>
             <a:ext cx="6843755" cy="131648"/>
           </a:xfrm>
           <a:prstGeom prst="rect">
@@ -13794,7 +13794,7 @@
         </p:nvSpPr>
         <p:spPr>
           <a:xfrm>
-            <a:off x="438898" y="9456734"/>
+            <a:off x="438898" y="9412851"/>
             <a:ext cx="50400" cy="50400"/>
           </a:xfrm>
           <a:prstGeom prst="rect">
@@ -13819,7 +13819,7 @@
         </p:nvSpPr>
         <p:spPr>
           <a:xfrm>
-            <a:off x="546898" y="9419767"/>
+            <a:off x="546898" y="9375884"/>
             <a:ext cx="6843755" cy="131648"/>
           </a:xfrm>
           <a:prstGeom prst="rect">
@@ -13878,7 +13878,7 @@
         </p:nvSpPr>
         <p:spPr>
           <a:xfrm>
-            <a:off x="438898" y="10266197"/>
+            <a:off x="438898" y="10134549"/>
             <a:ext cx="50400" cy="50400"/>
           </a:xfrm>
           <a:prstGeom prst="rect">
@@ -13903,8 +13903,8 @@
         </p:nvSpPr>
         <p:spPr>
           <a:xfrm>
-            <a:off x="546898" y="10229231"/>
-            <a:ext cx="6843755" cy="131648"/>
+            <a:off x="546898" y="10097583"/>
+            <a:ext cx="6843755" cy="263296"/>
           </a:xfrm>
           <a:prstGeom prst="rect">
             <a:avLst/>
@@ -14030,7 +14030,7 @@
         <p:spPr>
           <a:xfrm>
             <a:off x="7728952" y="7800840"/>
-            <a:ext cx="6951755" cy="154305"/>
+            <a:ext cx="6951755" cy="308610"/>
           </a:xfrm>
           <a:prstGeom prst="rect">
             <a:avLst/>
@@ -14088,7 +14088,7 @@
         </p:nvSpPr>
         <p:spPr>
           <a:xfrm>
-            <a:off x="7728952" y="8120745"/>
+            <a:off x="7728952" y="8275050"/>
             <a:ext cx="6951755" cy="462915"/>
           </a:xfrm>
           <a:prstGeom prst="rect">
@@ -14147,8 +14147,8 @@
         </p:nvSpPr>
         <p:spPr>
           <a:xfrm>
-            <a:off x="7728952" y="8749260"/>
-            <a:ext cx="6951755" cy="154305"/>
+            <a:off x="7728952" y="8903565"/>
+            <a:ext cx="6951755" cy="308610"/>
           </a:xfrm>
           <a:prstGeom prst="rect">
             <a:avLst/>
@@ -14390,8 +14390,8 @@
         </p:nvSpPr>
         <p:spPr>
           <a:xfrm>
-            <a:off x="12656964" y="365760"/>
-            <a:ext cx="1186641" cy="251460"/>
+            <a:off x="12673633" y="365760"/>
+            <a:ext cx="1169972" cy="251460"/>
           </a:xfrm>
           <a:prstGeom prst="roundRect">
             <a:avLst>
@@ -14417,8 +14417,8 @@
         </p:nvSpPr>
         <p:spPr>
           <a:xfrm>
-            <a:off x="12656964" y="365760"/>
-            <a:ext cx="1186641" cy="251460"/>
+            <a:off x="12673633" y="365760"/>
+            <a:ext cx="1169972" cy="251460"/>
           </a:xfrm>
           <a:prstGeom prst="rect">
             <a:avLst/>
@@ -14456,8 +14456,8 @@
         </p:nvSpPr>
         <p:spPr>
           <a:xfrm>
-            <a:off x="11321238" y="365760"/>
-            <a:ext cx="1245725" cy="251460"/>
+            <a:off x="11415298" y="365760"/>
+            <a:ext cx="1168335" cy="251460"/>
           </a:xfrm>
           <a:prstGeom prst="roundRect">
             <a:avLst>
@@ -14483,8 +14483,8 @@
         </p:nvSpPr>
         <p:spPr>
           <a:xfrm>
-            <a:off x="11321238" y="365760"/>
-            <a:ext cx="1245725" cy="251460"/>
+            <a:off x="11415298" y="365760"/>
+            <a:ext cx="1168335" cy="251460"/>
           </a:xfrm>
           <a:prstGeom prst="rect">
             <a:avLst/>
@@ -14522,8 +14522,8 @@
         </p:nvSpPr>
         <p:spPr>
           <a:xfrm>
-            <a:off x="10259357" y="365760"/>
-            <a:ext cx="971882" cy="251460"/>
+            <a:off x="10371127" y="365760"/>
+            <a:ext cx="954171" cy="251460"/>
           </a:xfrm>
           <a:prstGeom prst="roundRect">
             <a:avLst>
@@ -14549,8 +14549,8 @@
         </p:nvSpPr>
         <p:spPr>
           <a:xfrm>
-            <a:off x="10259357" y="365760"/>
-            <a:ext cx="971882" cy="251460"/>
+            <a:off x="10371127" y="365760"/>
+            <a:ext cx="954171" cy="251460"/>
           </a:xfrm>
           <a:prstGeom prst="rect">
             <a:avLst/>
@@ -14612,7 +14612,7 @@
         <p:spPr>
           <a:xfrm>
             <a:off x="323698" y="1115568"/>
-            <a:ext cx="14472209" cy="2629105"/>
+            <a:ext cx="14472209" cy="2743414"/>
           </a:xfrm>
           <a:prstGeom prst="rect">
             <a:avLst/>
@@ -14745,8 +14745,8 @@
         </p:nvSpPr>
         <p:spPr>
           <a:xfrm>
-            <a:off x="438898" y="1728900"/>
-            <a:ext cx="2762042" cy="1658158"/>
+            <a:off x="438898" y="1658541"/>
+            <a:ext cx="2762042" cy="1842826"/>
           </a:xfrm>
           <a:prstGeom prst="rect">
             <a:avLst/>
@@ -14770,7 +14770,7 @@
         </p:nvSpPr>
         <p:spPr>
           <a:xfrm>
-            <a:off x="438898" y="1728900"/>
+            <a:off x="438898" y="1658541"/>
             <a:ext cx="2762042" cy="28800"/>
           </a:xfrm>
           <a:prstGeom prst="rect">
@@ -14795,7 +14795,7 @@
         </p:nvSpPr>
         <p:spPr>
           <a:xfrm>
-            <a:off x="532498" y="1822500"/>
+            <a:off x="532498" y="1752141"/>
             <a:ext cx="2574842" cy="108966"/>
           </a:xfrm>
           <a:prstGeom prst="rect">
@@ -14837,7 +14837,7 @@
         </p:nvSpPr>
         <p:spPr>
           <a:xfrm>
-            <a:off x="532498" y="1989066"/>
+            <a:off x="532498" y="1918707"/>
             <a:ext cx="2574842" cy="135331"/>
           </a:xfrm>
           <a:prstGeom prst="rect">
@@ -14879,7 +14879,7 @@
         </p:nvSpPr>
         <p:spPr>
           <a:xfrm>
-            <a:off x="532498" y="2189197"/>
+            <a:off x="532498" y="2118838"/>
             <a:ext cx="2574842" cy="270662"/>
           </a:xfrm>
           <a:prstGeom prst="rect">
@@ -14938,8 +14938,8 @@
         </p:nvSpPr>
         <p:spPr>
           <a:xfrm>
-            <a:off x="3308839" y="1728900"/>
-            <a:ext cx="2762042" cy="1658158"/>
+            <a:off x="3308839" y="1658541"/>
+            <a:ext cx="2762042" cy="1842826"/>
           </a:xfrm>
           <a:prstGeom prst="rect">
             <a:avLst/>
@@ -14963,7 +14963,7 @@
         </p:nvSpPr>
         <p:spPr>
           <a:xfrm>
-            <a:off x="3308839" y="1728900"/>
+            <a:off x="3308839" y="1658541"/>
             <a:ext cx="2762042" cy="28800"/>
           </a:xfrm>
           <a:prstGeom prst="rect">
@@ -14988,7 +14988,7 @@
         </p:nvSpPr>
         <p:spPr>
           <a:xfrm>
-            <a:off x="3402439" y="1822500"/>
+            <a:off x="3402439" y="1752141"/>
             <a:ext cx="2574842" cy="108966"/>
           </a:xfrm>
           <a:prstGeom prst="rect">
@@ -15030,8 +15030,8 @@
         </p:nvSpPr>
         <p:spPr>
           <a:xfrm>
-            <a:off x="3402439" y="1989066"/>
-            <a:ext cx="2574842" cy="405994"/>
+            <a:off x="3402439" y="1918707"/>
+            <a:ext cx="2574842" cy="541325"/>
           </a:xfrm>
           <a:prstGeom prst="rect">
             <a:avLst/>
@@ -15072,8 +15072,8 @@
         </p:nvSpPr>
         <p:spPr>
           <a:xfrm>
-            <a:off x="3402439" y="2459860"/>
-            <a:ext cx="2574842" cy="676656"/>
+            <a:off x="3402439" y="2524832"/>
+            <a:ext cx="2574842" cy="811987"/>
           </a:xfrm>
           <a:prstGeom prst="rect">
             <a:avLst/>
@@ -15131,8 +15131,8 @@
         </p:nvSpPr>
         <p:spPr>
           <a:xfrm>
-            <a:off x="6178781" y="1728900"/>
-            <a:ext cx="2762042" cy="1658158"/>
+            <a:off x="6178781" y="1658541"/>
+            <a:ext cx="2762042" cy="1842826"/>
           </a:xfrm>
           <a:prstGeom prst="rect">
             <a:avLst/>
@@ -15156,7 +15156,7 @@
         </p:nvSpPr>
         <p:spPr>
           <a:xfrm>
-            <a:off x="6178781" y="1728900"/>
+            <a:off x="6178781" y="1658541"/>
             <a:ext cx="2762042" cy="28800"/>
           </a:xfrm>
           <a:prstGeom prst="rect">
@@ -15181,7 +15181,7 @@
         </p:nvSpPr>
         <p:spPr>
           <a:xfrm>
-            <a:off x="6272381" y="1822500"/>
+            <a:off x="6272381" y="1752141"/>
             <a:ext cx="2574842" cy="108966"/>
           </a:xfrm>
           <a:prstGeom prst="rect">
@@ -15223,8 +15223,8 @@
         </p:nvSpPr>
         <p:spPr>
           <a:xfrm>
-            <a:off x="6272381" y="1989066"/>
-            <a:ext cx="2574842" cy="135331"/>
+            <a:off x="6272381" y="1918707"/>
+            <a:ext cx="2574842" cy="270662"/>
           </a:xfrm>
           <a:prstGeom prst="rect">
             <a:avLst/>
@@ -15265,7 +15265,7 @@
         </p:nvSpPr>
         <p:spPr>
           <a:xfrm>
-            <a:off x="6272381" y="2189197"/>
+            <a:off x="6272381" y="2254170"/>
             <a:ext cx="2574842" cy="270662"/>
           </a:xfrm>
           <a:prstGeom prst="rect">
@@ -15324,8 +15324,8 @@
         </p:nvSpPr>
         <p:spPr>
           <a:xfrm>
-            <a:off x="9048722" y="1728900"/>
-            <a:ext cx="2762042" cy="1658158"/>
+            <a:off x="9048722" y="1658541"/>
+            <a:ext cx="2762042" cy="1842826"/>
           </a:xfrm>
           <a:prstGeom prst="rect">
             <a:avLst/>
@@ -15349,7 +15349,7 @@
         </p:nvSpPr>
         <p:spPr>
           <a:xfrm>
-            <a:off x="9048722" y="1728900"/>
+            <a:off x="9048722" y="1658541"/>
             <a:ext cx="2762042" cy="28800"/>
           </a:xfrm>
           <a:prstGeom prst="rect">
@@ -15374,7 +15374,7 @@
         </p:nvSpPr>
         <p:spPr>
           <a:xfrm>
-            <a:off x="9142322" y="1822500"/>
+            <a:off x="9142322" y="1752141"/>
             <a:ext cx="2574842" cy="108966"/>
           </a:xfrm>
           <a:prstGeom prst="rect">
@@ -15416,7 +15416,7 @@
         </p:nvSpPr>
         <p:spPr>
           <a:xfrm>
-            <a:off x="9142322" y="1989066"/>
+            <a:off x="9142322" y="1918707"/>
             <a:ext cx="2574842" cy="270662"/>
           </a:xfrm>
           <a:prstGeom prst="rect">
@@ -15458,7 +15458,7 @@
         </p:nvSpPr>
         <p:spPr>
           <a:xfrm>
-            <a:off x="9142322" y="2324529"/>
+            <a:off x="9142322" y="2254170"/>
             <a:ext cx="2574842" cy="405994"/>
           </a:xfrm>
           <a:prstGeom prst="rect">
@@ -15517,8 +15517,8 @@
         </p:nvSpPr>
         <p:spPr>
           <a:xfrm>
-            <a:off x="11918664" y="1728900"/>
-            <a:ext cx="2762042" cy="1658158"/>
+            <a:off x="11918664" y="1658541"/>
+            <a:ext cx="2762042" cy="1842826"/>
           </a:xfrm>
           <a:prstGeom prst="rect">
             <a:avLst/>
@@ -15542,7 +15542,7 @@
         </p:nvSpPr>
         <p:spPr>
           <a:xfrm>
-            <a:off x="11918664" y="1728900"/>
+            <a:off x="11918664" y="1658541"/>
             <a:ext cx="2762042" cy="28800"/>
           </a:xfrm>
           <a:prstGeom prst="rect">
@@ -15567,7 +15567,7 @@
         </p:nvSpPr>
         <p:spPr>
           <a:xfrm>
-            <a:off x="12012264" y="1822500"/>
+            <a:off x="12012264" y="1752141"/>
             <a:ext cx="2574842" cy="108966"/>
           </a:xfrm>
           <a:prstGeom prst="rect">
@@ -15609,7 +15609,7 @@
         </p:nvSpPr>
         <p:spPr>
           <a:xfrm>
-            <a:off x="12012264" y="1989066"/>
+            <a:off x="12012264" y="1918707"/>
             <a:ext cx="2574842" cy="270662"/>
           </a:xfrm>
           <a:prstGeom prst="rect">
@@ -15651,8 +15651,8 @@
         </p:nvSpPr>
         <p:spPr>
           <a:xfrm>
-            <a:off x="12012264" y="2324529"/>
-            <a:ext cx="2574842" cy="270662"/>
+            <a:off x="12012264" y="2254170"/>
+            <a:ext cx="2574842" cy="405994"/>
           </a:xfrm>
           <a:prstGeom prst="rect">
             <a:avLst/>
@@ -15710,7 +15710,7 @@
         </p:nvSpPr>
         <p:spPr>
           <a:xfrm>
-            <a:off x="438898" y="3451858"/>
+            <a:off x="438898" y="3566167"/>
             <a:ext cx="14241809" cy="0"/>
           </a:xfrm>
           <a:prstGeom prst="line">
@@ -15733,7 +15733,7 @@
         </p:nvSpPr>
         <p:spPr>
           <a:xfrm>
-            <a:off x="438898" y="3509458"/>
+            <a:off x="438898" y="3623767"/>
             <a:ext cx="14241809" cy="120015"/>
           </a:xfrm>
           <a:prstGeom prst="rect">
@@ -15775,8 +15775,8 @@
         </p:nvSpPr>
         <p:spPr>
           <a:xfrm>
-            <a:off x="323698" y="3852572"/>
-            <a:ext cx="5967146" cy="3572153"/>
+            <a:off x="323698" y="3966881"/>
+            <a:ext cx="5967146" cy="3457845"/>
           </a:xfrm>
           <a:prstGeom prst="rect">
             <a:avLst/>
@@ -15800,7 +15800,7 @@
         </p:nvSpPr>
         <p:spPr>
           <a:xfrm>
-            <a:off x="438898" y="3967772"/>
+            <a:off x="438898" y="4082081"/>
             <a:ext cx="5736746" cy="112268"/>
           </a:xfrm>
           <a:prstGeom prst="rect">
@@ -15849,7 +15849,7 @@
           </p:nvPr>
         </p:nvGraphicFramePr>
         <p:xfrm>
-          <a:off x="438898" y="4137640"/>
+          <a:off x="438898" y="4251949"/>
           <a:ext cx="11339703" cy="914400"/>
         </p:xfrm>
         <a:graphic>
@@ -15860,7 +15860,7 @@
                 <a:gridCol w="2868373"/>
                 <a:gridCol w="2868373"/>
               </a:tblGrid>
-              <a:tr h="335796">
+              <a:tr h="292145">
                 <a:tc>
                   <a:txBody>
                     <a:bodyPr/>
@@ -15968,7 +15968,7 @@
                   </a:tcPr>
                 </a:tc>
               </a:tr>
-              <a:tr h="354820">
+              <a:tr h="311169">
                 <a:tc>
                   <a:txBody>
                     <a:bodyPr/>
@@ -16076,7 +16076,7 @@
                   </a:tcPr>
                 </a:tc>
               </a:tr>
-              <a:tr h="589719">
+              <a:tr h="546068">
                 <a:tc>
                   <a:txBody>
                     <a:bodyPr/>
@@ -16208,7 +16208,7 @@
                   </a:tcPr>
                 </a:tc>
               </a:tr>
-              <a:tr h="472270">
+              <a:tr h="428619">
                 <a:tc>
                   <a:txBody>
                     <a:bodyPr/>
@@ -16340,7 +16340,7 @@
                   </a:tcPr>
                 </a:tc>
               </a:tr>
-              <a:tr h="354820">
+              <a:tr h="428619">
                 <a:tc>
                   <a:txBody>
                     <a:bodyPr/>
@@ -16448,7 +16448,7 @@
                   </a:tcPr>
                 </a:tc>
               </a:tr>
-              <a:tr h="354820">
+              <a:tr h="311169">
                 <a:tc>
                   <a:txBody>
                     <a:bodyPr/>
@@ -16556,7 +16556,7 @@
                   </a:tcPr>
                 </a:tc>
               </a:tr>
-              <a:tr h="354820">
+              <a:tr h="428619">
                 <a:tc>
                   <a:txBody>
                     <a:bodyPr/>
@@ -16664,7 +16664,7 @@
                   </a:tcPr>
                 </a:tc>
               </a:tr>
-              <a:tr h="354820">
+              <a:tr h="311169">
                 <a:tc>
                   <a:txBody>
                     <a:bodyPr/>
@@ -16784,8 +16784,8 @@
         </p:nvSpPr>
         <p:spPr>
           <a:xfrm>
-            <a:off x="6398743" y="3852572"/>
-            <a:ext cx="8397164" cy="3572153"/>
+            <a:off x="6398743" y="3966881"/>
+            <a:ext cx="8397164" cy="3457845"/>
           </a:xfrm>
           <a:prstGeom prst="rect">
             <a:avLst/>
@@ -16809,7 +16809,7 @@
         </p:nvSpPr>
         <p:spPr>
           <a:xfrm>
-            <a:off x="6513943" y="3967772"/>
+            <a:off x="6513943" y="4082081"/>
             <a:ext cx="8166764" cy="112268"/>
           </a:xfrm>
           <a:prstGeom prst="rect">
@@ -16851,7 +16851,7 @@
         </p:nvSpPr>
         <p:spPr>
           <a:xfrm>
-            <a:off x="6513943" y="4137640"/>
+            <a:off x="6513943" y="4251949"/>
             <a:ext cx="8166764" cy="150724"/>
           </a:xfrm>
           <a:prstGeom prst="rect">
@@ -16893,7 +16893,7 @@
         </p:nvSpPr>
         <p:spPr>
           <a:xfrm>
-            <a:off x="6513943" y="4380333"/>
+            <a:off x="6513943" y="4487293"/>
             <a:ext cx="8166764" cy="308610"/>
           </a:xfrm>
           <a:prstGeom prst="rect">
@@ -16935,7 +16935,7 @@
         </p:nvSpPr>
         <p:spPr>
           <a:xfrm>
-            <a:off x="6513943" y="4780912"/>
+            <a:off x="6513943" y="4880524"/>
             <a:ext cx="8166764" cy="150724"/>
           </a:xfrm>
           <a:prstGeom prst="rect">
@@ -16977,7 +16977,7 @@
         </p:nvSpPr>
         <p:spPr>
           <a:xfrm>
-            <a:off x="6513943" y="5023605"/>
+            <a:off x="6513943" y="5115868"/>
             <a:ext cx="8166764" cy="154305"/>
           </a:xfrm>
           <a:prstGeom prst="rect">
@@ -17019,7 +17019,7 @@
         </p:nvSpPr>
         <p:spPr>
           <a:xfrm>
-            <a:off x="6513943" y="5269879"/>
+            <a:off x="6513943" y="5354794"/>
             <a:ext cx="8166764" cy="150724"/>
           </a:xfrm>
           <a:prstGeom prst="rect">
@@ -17061,7 +17061,7 @@
         </p:nvSpPr>
         <p:spPr>
           <a:xfrm>
-            <a:off x="6513943" y="5512572"/>
+            <a:off x="6513943" y="5590138"/>
             <a:ext cx="8166764" cy="308610"/>
           </a:xfrm>
           <a:prstGeom prst="rect">
@@ -17137,7 +17137,7 @@
         </p:nvSpPr>
         <p:spPr>
           <a:xfrm>
-            <a:off x="6513943" y="5913151"/>
+            <a:off x="6513943" y="5983369"/>
             <a:ext cx="8166764" cy="150724"/>
           </a:xfrm>
           <a:prstGeom prst="rect">
@@ -17179,7 +17179,7 @@
         </p:nvSpPr>
         <p:spPr>
           <a:xfrm>
-            <a:off x="6513943" y="6155843"/>
+            <a:off x="6513943" y="6218713"/>
             <a:ext cx="8166764" cy="617220"/>
           </a:xfrm>
           <a:prstGeom prst="rect">
@@ -17429,8 +17429,8 @@
         </p:nvSpPr>
         <p:spPr>
           <a:xfrm>
-            <a:off x="438898" y="8402800"/>
-            <a:ext cx="4521737" cy="617220"/>
+            <a:off x="438898" y="8356509"/>
+            <a:ext cx="4521737" cy="771525"/>
           </a:xfrm>
           <a:prstGeom prst="rect">
             <a:avLst/>
@@ -17488,8 +17488,8 @@
         </p:nvSpPr>
         <p:spPr>
           <a:xfrm>
-            <a:off x="438898" y="9142213"/>
-            <a:ext cx="4521737" cy="308610"/>
+            <a:off x="438898" y="9203935"/>
+            <a:ext cx="4521737" cy="462915"/>
           </a:xfrm>
           <a:prstGeom prst="rect">
             <a:avLst/>
@@ -17547,7 +17547,7 @@
         </p:nvSpPr>
         <p:spPr>
           <a:xfrm>
-            <a:off x="438898" y="9573015"/>
+            <a:off x="438898" y="9742751"/>
             <a:ext cx="4521737" cy="308610"/>
           </a:xfrm>
           <a:prstGeom prst="rect">
@@ -18025,7 +18025,7 @@
         <p:spPr>
           <a:xfrm>
             <a:off x="10158970" y="7817693"/>
-            <a:ext cx="2224868" cy="546122"/>
+            <a:ext cx="2224868" cy="458111"/>
           </a:xfrm>
           <a:prstGeom prst="rect">
             <a:avLst/>
@@ -18092,7 +18092,7 @@
         <p:spPr>
           <a:xfrm>
             <a:off x="10266970" y="8147113"/>
-            <a:ext cx="2008868" cy="176022"/>
+            <a:ext cx="2008868" cy="88011"/>
           </a:xfrm>
           <a:prstGeom prst="rect">
             <a:avLst/>
@@ -18134,7 +18134,7 @@
         <p:spPr>
           <a:xfrm>
             <a:off x="12455838" y="7817693"/>
-            <a:ext cx="2224868" cy="546122"/>
+            <a:ext cx="2224868" cy="458111"/>
           </a:xfrm>
           <a:prstGeom prst="rect">
             <a:avLst/>
@@ -18201,7 +18201,7 @@
         <p:spPr>
           <a:xfrm>
             <a:off x="12563838" y="8147113"/>
-            <a:ext cx="2008868" cy="176022"/>
+            <a:ext cx="2008868" cy="88011"/>
           </a:xfrm>
           <a:prstGeom prst="rect">
             <a:avLst/>
@@ -18242,8 +18242,8 @@
         </p:nvSpPr>
         <p:spPr>
           <a:xfrm>
-            <a:off x="10158970" y="8435815"/>
-            <a:ext cx="2224868" cy="546122"/>
+            <a:off x="10158970" y="8347804"/>
+            <a:ext cx="2224868" cy="458111"/>
           </a:xfrm>
           <a:prstGeom prst="rect">
             <a:avLst/>
@@ -18267,7 +18267,7 @@
         </p:nvSpPr>
         <p:spPr>
           <a:xfrm>
-            <a:off x="10266970" y="8522215"/>
+            <a:off x="10266970" y="8434204"/>
             <a:ext cx="2008868" cy="185420"/>
           </a:xfrm>
           <a:prstGeom prst="rect">
@@ -18309,8 +18309,8 @@
         </p:nvSpPr>
         <p:spPr>
           <a:xfrm>
-            <a:off x="10266970" y="8765235"/>
-            <a:ext cx="2008868" cy="176022"/>
+            <a:off x="10266970" y="8677224"/>
+            <a:ext cx="2008868" cy="88011"/>
           </a:xfrm>
           <a:prstGeom prst="rect">
             <a:avLst/>
@@ -18351,8 +18351,8 @@
         </p:nvSpPr>
         <p:spPr>
           <a:xfrm>
-            <a:off x="12455838" y="8435815"/>
-            <a:ext cx="2224868" cy="546122"/>
+            <a:off x="12455838" y="8347804"/>
+            <a:ext cx="2224868" cy="458111"/>
           </a:xfrm>
           <a:prstGeom prst="rect">
             <a:avLst/>
@@ -18376,7 +18376,7 @@
         </p:nvSpPr>
         <p:spPr>
           <a:xfrm>
-            <a:off x="12563838" y="8522215"/>
+            <a:off x="12563838" y="8434204"/>
             <a:ext cx="2008868" cy="185420"/>
           </a:xfrm>
           <a:prstGeom prst="rect">
@@ -18418,8 +18418,8 @@
         </p:nvSpPr>
         <p:spPr>
           <a:xfrm>
-            <a:off x="12563838" y="8765235"/>
-            <a:ext cx="2008868" cy="176022"/>
+            <a:off x="12563838" y="8677224"/>
+            <a:ext cx="2008868" cy="88011"/>
           </a:xfrm>
           <a:prstGeom prst="rect">
             <a:avLst/>
@@ -18460,7 +18460,7 @@
         </p:nvSpPr>
         <p:spPr>
           <a:xfrm>
-            <a:off x="10158970" y="9147537"/>
+            <a:off x="10158970" y="8971515"/>
             <a:ext cx="4521737" cy="308610"/>
           </a:xfrm>
           <a:prstGeom prst="rect">
@@ -18519,7 +18519,7 @@
         </p:nvSpPr>
         <p:spPr>
           <a:xfrm>
-            <a:off x="10158970" y="9621747"/>
+            <a:off x="10158970" y="9445725"/>
             <a:ext cx="4521737" cy="308610"/>
           </a:xfrm>
           <a:prstGeom prst="rect">
@@ -18697,8 +18697,8 @@
         </p:nvSpPr>
         <p:spPr>
           <a:xfrm>
-            <a:off x="12656964" y="365760"/>
-            <a:ext cx="1186641" cy="251460"/>
+            <a:off x="12673633" y="365760"/>
+            <a:ext cx="1169972" cy="251460"/>
           </a:xfrm>
           <a:prstGeom prst="roundRect">
             <a:avLst>
@@ -18724,8 +18724,8 @@
         </p:nvSpPr>
         <p:spPr>
           <a:xfrm>
-            <a:off x="12656964" y="365760"/>
-            <a:ext cx="1186641" cy="251460"/>
+            <a:off x="12673633" y="365760"/>
+            <a:ext cx="1169972" cy="251460"/>
           </a:xfrm>
           <a:prstGeom prst="rect">
             <a:avLst/>
@@ -18763,8 +18763,8 @@
         </p:nvSpPr>
         <p:spPr>
           <a:xfrm>
-            <a:off x="11321238" y="365760"/>
-            <a:ext cx="1245725" cy="251460"/>
+            <a:off x="11415298" y="365760"/>
+            <a:ext cx="1168335" cy="251460"/>
           </a:xfrm>
           <a:prstGeom prst="roundRect">
             <a:avLst>
@@ -18790,8 +18790,8 @@
         </p:nvSpPr>
         <p:spPr>
           <a:xfrm>
-            <a:off x="11321238" y="365760"/>
-            <a:ext cx="1245725" cy="251460"/>
+            <a:off x="11415298" y="365760"/>
+            <a:ext cx="1168335" cy="251460"/>
           </a:xfrm>
           <a:prstGeom prst="rect">
             <a:avLst/>
@@ -18829,8 +18829,8 @@
         </p:nvSpPr>
         <p:spPr>
           <a:xfrm>
-            <a:off x="10259357" y="365760"/>
-            <a:ext cx="971882" cy="251460"/>
+            <a:off x="10367853" y="365760"/>
+            <a:ext cx="957445" cy="251460"/>
           </a:xfrm>
           <a:prstGeom prst="roundRect">
             <a:avLst>
@@ -18856,8 +18856,8 @@
         </p:nvSpPr>
         <p:spPr>
           <a:xfrm>
-            <a:off x="10259357" y="365760"/>
-            <a:ext cx="971882" cy="251460"/>
+            <a:off x="10367853" y="365760"/>
+            <a:ext cx="957445" cy="251460"/>
           </a:xfrm>
           <a:prstGeom prst="rect">
             <a:avLst/>
@@ -19145,7 +19145,7 @@
         <p:spPr>
           <a:xfrm>
             <a:off x="626098" y="1659151"/>
-            <a:ext cx="3198728" cy="133452"/>
+            <a:ext cx="3198728" cy="266903"/>
           </a:xfrm>
           <a:prstGeom prst="rect">
             <a:avLst/>
@@ -19186,7 +19186,7 @@
         </p:nvSpPr>
         <p:spPr>
           <a:xfrm>
-            <a:off x="532498" y="1873671"/>
+            <a:off x="532498" y="2007122"/>
             <a:ext cx="50400" cy="50400"/>
           </a:xfrm>
           <a:prstGeom prst="rect">
@@ -19211,7 +19211,7 @@
         </p:nvSpPr>
         <p:spPr>
           <a:xfrm>
-            <a:off x="626098" y="1835803"/>
+            <a:off x="626098" y="1969254"/>
             <a:ext cx="3198728" cy="133452"/>
           </a:xfrm>
           <a:prstGeom prst="rect">
@@ -19253,7 +19253,7 @@
         </p:nvSpPr>
         <p:spPr>
           <a:xfrm>
-            <a:off x="532498" y="2050322"/>
+            <a:off x="532498" y="2183774"/>
             <a:ext cx="50400" cy="50400"/>
           </a:xfrm>
           <a:prstGeom prst="rect">
@@ -19278,7 +19278,7 @@
         </p:nvSpPr>
         <p:spPr>
           <a:xfrm>
-            <a:off x="626098" y="2012454"/>
+            <a:off x="626098" y="2145906"/>
             <a:ext cx="3198728" cy="133452"/>
           </a:xfrm>
           <a:prstGeom prst="rect">
@@ -19320,7 +19320,7 @@
         </p:nvSpPr>
         <p:spPr>
           <a:xfrm>
-            <a:off x="532498" y="2226974"/>
+            <a:off x="532498" y="2360426"/>
             <a:ext cx="50400" cy="50400"/>
           </a:xfrm>
           <a:prstGeom prst="rect">
@@ -19345,7 +19345,7 @@
         </p:nvSpPr>
         <p:spPr>
           <a:xfrm>
-            <a:off x="626098" y="2189106"/>
+            <a:off x="626098" y="2322557"/>
             <a:ext cx="3198728" cy="133452"/>
           </a:xfrm>
           <a:prstGeom prst="rect">
@@ -19387,7 +19387,7 @@
         </p:nvSpPr>
         <p:spPr>
           <a:xfrm>
-            <a:off x="532498" y="2403626"/>
+            <a:off x="532498" y="2537077"/>
             <a:ext cx="50400" cy="50400"/>
           </a:xfrm>
           <a:prstGeom prst="rect">
@@ -19412,7 +19412,7 @@
         </p:nvSpPr>
         <p:spPr>
           <a:xfrm>
-            <a:off x="626098" y="2365757"/>
+            <a:off x="626098" y="2499209"/>
             <a:ext cx="3198728" cy="133452"/>
           </a:xfrm>
           <a:prstGeom prst="rect">
@@ -19454,7 +19454,7 @@
         </p:nvSpPr>
         <p:spPr>
           <a:xfrm>
-            <a:off x="532498" y="2580277"/>
+            <a:off x="532498" y="2713729"/>
             <a:ext cx="50400" cy="50400"/>
           </a:xfrm>
           <a:prstGeom prst="rect">
@@ -19479,7 +19479,7 @@
         </p:nvSpPr>
         <p:spPr>
           <a:xfrm>
-            <a:off x="626098" y="2542409"/>
+            <a:off x="626098" y="2675861"/>
             <a:ext cx="3198728" cy="133452"/>
           </a:xfrm>
           <a:prstGeom prst="rect">
@@ -19521,7 +19521,7 @@
         </p:nvSpPr>
         <p:spPr>
           <a:xfrm>
-            <a:off x="532498" y="2756929"/>
+            <a:off x="532498" y="2890380"/>
             <a:ext cx="50400" cy="50400"/>
           </a:xfrm>
           <a:prstGeom prst="rect">
@@ -19546,7 +19546,7 @@
         </p:nvSpPr>
         <p:spPr>
           <a:xfrm>
-            <a:off x="626098" y="2719061"/>
+            <a:off x="626098" y="2852512"/>
             <a:ext cx="3198728" cy="133452"/>
           </a:xfrm>
           <a:prstGeom prst="rect">
@@ -20868,7 +20868,7 @@
         <p:spPr>
           <a:xfrm>
             <a:off x="438898" y="4071385"/>
-            <a:ext cx="4521737" cy="161239"/>
+            <a:ext cx="4521737" cy="322478"/>
           </a:xfrm>
           <a:prstGeom prst="rect">
             <a:avLst/>
@@ -20909,7 +20909,7 @@
         </p:nvSpPr>
         <p:spPr>
           <a:xfrm>
-            <a:off x="438898" y="4374372"/>
+            <a:off x="438898" y="4493325"/>
             <a:ext cx="4521737" cy="308610"/>
           </a:xfrm>
           <a:prstGeom prst="rect">
@@ -20968,8 +20968,8 @@
         </p:nvSpPr>
         <p:spPr>
           <a:xfrm>
-            <a:off x="438898" y="4824731"/>
-            <a:ext cx="4521737" cy="308610"/>
+            <a:off x="438898" y="4901397"/>
+            <a:ext cx="4521737" cy="462915"/>
           </a:xfrm>
           <a:prstGeom prst="rect">
             <a:avLst/>
@@ -21027,7 +21027,7 @@
         </p:nvSpPr>
         <p:spPr>
           <a:xfrm>
-            <a:off x="438898" y="5275089"/>
+            <a:off x="438898" y="5463774"/>
             <a:ext cx="4521737" cy="308610"/>
           </a:xfrm>
           <a:prstGeom prst="rect">
@@ -21086,8 +21086,8 @@
         </p:nvSpPr>
         <p:spPr>
           <a:xfrm>
-            <a:off x="438898" y="5725447"/>
-            <a:ext cx="4521737" cy="462915"/>
+            <a:off x="438898" y="5871846"/>
+            <a:ext cx="4521737" cy="617220"/>
           </a:xfrm>
           <a:prstGeom prst="rect">
             <a:avLst/>
@@ -21145,7 +21145,7 @@
         </p:nvSpPr>
         <p:spPr>
           <a:xfrm>
-            <a:off x="438898" y="6330111"/>
+            <a:off x="438898" y="6588528"/>
             <a:ext cx="4521737" cy="308610"/>
           </a:xfrm>
           <a:prstGeom prst="rect">
@@ -21351,9 +21351,9 @@
             <a:tbl>
               <a:tblPr/>
               <a:tblGrid>
-                <a:gridCol w="1769137"/>
-                <a:gridCol w="3336271"/>
-                <a:gridCol w="631337"/>
+                <a:gridCol w="1788819"/>
+                <a:gridCol w="3264525"/>
+                <a:gridCol w="683401"/>
               </a:tblGrid>
               <a:tr h="207590">
                 <a:tc>
@@ -23635,7 +23635,7 @@
         <p:spPr>
           <a:xfrm>
             <a:off x="11373979" y="4699900"/>
-            <a:ext cx="3306728" cy="617220"/>
+            <a:ext cx="3306728" cy="771525"/>
           </a:xfrm>
           <a:prstGeom prst="rect">
             <a:avLst/>
@@ -23693,8 +23693,8 @@
         </p:nvSpPr>
         <p:spPr>
           <a:xfrm>
-            <a:off x="11373979" y="5482720"/>
-            <a:ext cx="3306728" cy="617220"/>
+            <a:off x="11373979" y="5637025"/>
+            <a:ext cx="3306728" cy="771525"/>
           </a:xfrm>
           <a:prstGeom prst="rect">
             <a:avLst/>
@@ -23916,13 +23916,13 @@
             <a:tbl>
               <a:tblPr/>
               <a:tblGrid>
-                <a:gridCol w="3425197"/>
-                <a:gridCol w="1025001"/>
-                <a:gridCol w="931992"/>
-                <a:gridCol w="1002650"/>
-                <a:gridCol w="963716"/>
-                <a:gridCol w="1213181"/>
-                <a:gridCol w="820036"/>
+                <a:gridCol w="3783265"/>
+                <a:gridCol w="968252"/>
+                <a:gridCol w="878819"/>
+                <a:gridCol w="927794"/>
+                <a:gridCol w="889111"/>
+                <a:gridCol w="1127244"/>
+                <a:gridCol w="807287"/>
               </a:tblGrid>
               <a:tr h="204057">
                 <a:tc>
